--- a/Denver/Common-Altitude-2027/decks/07-Collectors-and-Advisors.pptx
+++ b/Denver/Common-Altitude-2027/decks/07-Collectors-and-Advisors.pptx
@@ -529,7 +529,7 @@
           </a:p>
           <a:p>
             <a:r>
-              <a:t>Proposed Denver Art Fair &amp; Exhibition · August 2027</a:t>
+              <a:t>Proposed Denver Art Fair &amp; Exhibition, August 2027</a:t>
             </a:r>
           </a:p>
           <a:p/>
@@ -537,7 +537,7 @@
           <a:p/>
           <a:p>
             <a:r>
-              <a:t>Status: working proposal; site/date/partners/funding/capacities unconfirmed. No external action is authorized by the deck.</a:t>
+              <a:t>Status: working proposal. Site, dates, partners, funding and capacity need confirmation. The deck grants no external-action authority.</a:t>
             </a:r>
           </a:p>
           <a:p>
@@ -627,13 +627,13 @@
           </a:p>
           <a:p>
             <a:r>
-              <a:t>Help shape the right offer.</a:t>
+              <a:t>Collector research questions</a:t>
             </a:r>
           </a:p>
           <a:p/>
           <a:p>
             <a:r>
-              <a:t>We are testing actual needs rather than guessing who will buy.</a:t>
+              <a:t>Ask about actual interests, practical needs and buying support.</a:t>
             </a:r>
           </a:p>
           <a:p/>
@@ -655,7 +655,7 @@
           <a:p/>
           <a:p>
             <a:r>
-              <a:t>Status: working proposal; site/date/partners/funding/capacities unconfirmed. No external action is authorized by the deck.</a:t>
+              <a:t>Status: working proposal. Site, dates, partners, funding and capacity need confirmation. The deck grants no external-action authority.</a:t>
             </a:r>
           </a:p>
           <a:p>
@@ -745,13 +745,13 @@
           </a:p>
           <a:p>
             <a:r>
-              <a:t>Tell us what would make it worthwhile.</a:t>
+              <a:t>Expression of interest</a:t>
             </a:r>
           </a:p>
           <a:p/>
           <a:p>
             <a:r>
-              <a:t>An expression of interest is not a reservation, purchase obligation or promised work allocation.</a:t>
+              <a:t>Interest creates no reservation, purchase obligation or artwork allocation.</a:t>
             </a:r>
           </a:p>
           <a:p/>
@@ -773,7 +773,7 @@
           <a:p/>
           <a:p>
             <a:r>
-              <a:t>Status: working proposal; site/date/partners/funding/capacities unconfirmed. No external action is authorized by the deck.</a:t>
+              <a:t>Status: working proposal. Site, dates, partners, funding and capacity need confirmation. The deck grants no external-action authority.</a:t>
             </a:r>
           </a:p>
           <a:p>
@@ -863,13 +863,13 @@
           </a:p>
           <a:p>
             <a:r>
-              <a:t>A carefully labeled proposition.</a:t>
+              <a:t>Sources and current status</a:t>
             </a:r>
           </a:p>
           <a:p/>
           <a:p>
             <a:r>
-              <a:t>No artwork inventory, celebrity appearance, venue/date or gallery partnership is guaranteed.</a:t>
+              <a:t>The project guarantees no inventory, appearance, venue, date or gallery participation.</a:t>
             </a:r>
           </a:p>
           <a:p/>
@@ -880,7 +880,7 @@
           </a:p>
           <a:p>
             <a:r>
-              <a:t>All displayed graphics are original concepts, not reproductions of a named artist's work.</a:t>
+              <a:t>The deck uses original concept graphics. It reproduces no named artist’s work.</a:t>
             </a:r>
           </a:p>
           <a:p>
@@ -891,7 +891,7 @@
           <a:p/>
           <a:p>
             <a:r>
-              <a:t>Status: working proposal; site/date/partners/funding/capacities unconfirmed. No external action is authorized by the deck.</a:t>
+              <a:t>Status: working proposal. Site, dates, partners, funding and capacity need confirmation. The deck grants no external-action authority.</a:t>
             </a:r>
           </a:p>
           <a:p>
@@ -981,13 +981,13 @@
           </a:p>
           <a:p>
             <a:r>
-              <a:t>Distinctive work. Trusted sellers. Time to look.</a:t>
+              <a:t>Art selection and buying service</a:t>
             </a:r>
           </a:p>
           <a:p/>
           <a:p>
             <a:r>
-              <a:t>The proposition is thoughtful discovery with dependable acquisition service.</a:t>
+              <a:t>The proposal combines selected gallery and artist presentations with human acquisition support.</a:t>
             </a:r>
           </a:p>
           <a:p/>
@@ -998,18 +998,18 @@
           </a:p>
           <a:p>
             <a:r>
-              <a:t>A remarkable environment without losing clarity.</a:t>
-            </a:r>
-          </a:p>
-          <a:p>
-            <a:r>
-              <a:t>A real human who can help you follow through.</a:t>
+              <a:t>Rooms for work, with readable labels and clear routes.</a:t>
+            </a:r>
+          </a:p>
+          <a:p>
+            <a:r>
+              <a:t>A staff contact for appointments, seller questions and delivery follow-up.</a:t>
             </a:r>
           </a:p>
           <a:p/>
           <a:p>
             <a:r>
-              <a:t>Status: working proposal; site/date/partners/funding/capacities unconfirmed. No external action is authorized by the deck.</a:t>
+              <a:t>Status: working proposal. Site, dates, partners, funding and capacity need confirmation. The deck grants no external-action authority.</a:t>
             </a:r>
           </a:p>
           <a:p>
@@ -1099,19 +1099,19 @@
           </a:p>
           <a:p>
             <a:r>
-              <a:t>What would make the trip worthwhile?</a:t>
+              <a:t>Reasons to visit Denver</a:t>
             </a:r>
           </a:p>
           <a:p/>
           <a:p>
             <a:r>
-              <a:t>This is a demand conversation; the roster and work are not confirmed.</a:t>
+              <a:t>Buyer interviews must establish demand. The project has no confirmed roster or available work.</a:t>
             </a:r>
           </a:p>
           <a:p/>
           <a:p>
             <a:r>
-              <a:t>Quality / A coherent curatorial argument and work that rewards attention.</a:t>
+              <a:t>Quality / Specific artists and works selected by an accountable curator.</a:t>
             </a:r>
           </a:p>
           <a:p>
@@ -1127,7 +1127,7 @@
           <a:p/>
           <a:p>
             <a:r>
-              <a:t>Status: working proposal; site/date/partners/funding/capacities unconfirmed. No external action is authorized by the deck.</a:t>
+              <a:t>Status: working proposal. Site, dates, partners, funding and capacity need confirmation. The deck grants no external-action authority.</a:t>
             </a:r>
           </a:p>
           <a:p>
@@ -1217,13 +1217,13 @@
           </a:p>
           <a:p>
             <a:r>
-              <a:t>A proposed constellation of rooms.</a:t>
+              <a:t>Proposed rooms and catalog</a:t>
             </a:r>
           </a:p>
           <a:p/>
           <a:p>
             <a:r>
-              <a:t>60 functional spaces is a planning concept, not a confirmed building plan.</a:t>
+              <a:t>The 60-space concept needs a site survey and owner approval.</a:t>
             </a:r>
           </a:p>
           <a:p/>
@@ -1250,7 +1250,7 @@
           <a:p/>
           <a:p>
             <a:r>
-              <a:t>Status: working proposal; site/date/partners/funding/capacities unconfirmed. No external action is authorized by the deck.</a:t>
+              <a:t>Status: working proposal. Site, dates, partners, funding and capacity need confirmation. The deck grants no external-action authority.</a:t>
             </a:r>
           </a:p>
           <a:p>
@@ -1340,35 +1340,35 @@
           </a:p>
           <a:p>
             <a:r>
-              <a:t>The unexpected should have substance.</a:t>
+              <a:t>Signature commission ideas</a:t>
             </a:r>
           </a:p>
           <a:p/>
           <a:p>
             <a:r>
-              <a:t>Signature concepts are uncommissioned invitations, not promised famous works.</a:t>
+              <a:t>Artists would develop these briefs through funded agreements. No famous work has a booking.</a:t>
             </a:r>
           </a:p>
           <a:p/>
           <a:p>
             <a:r>
-              <a:t>Perception / A room that changes how you look.</a:t>
-            </a:r>
-          </a:p>
-          <a:p>
-            <a:r>
-              <a:t>Material + memory / Artist-led responses to work, place and possibility.</a:t>
-            </a:r>
-          </a:p>
-          <a:p>
-            <a:r>
-              <a:t>Public imagination / Paid local contribution and a genuine welcome.</a:t>
+              <a:t>Perception / An artist-authored room exploring perception.</a:t>
+            </a:r>
+          </a:p>
+          <a:p>
+            <a:r>
+              <a:t>Material + memory / Work responding to office materials and the history of the site.</a:t>
+            </a:r>
+          </a:p>
+          <a:p>
+            <a:r>
+              <a:t>Public imagination / Paid local artists and free public access.</a:t>
             </a:r>
           </a:p>
           <a:p/>
           <a:p>
             <a:r>
-              <a:t>Status: working proposal; site/date/partners/funding/capacities unconfirmed. No external action is authorized by the deck.</a:t>
+              <a:t>Status: working proposal. Site, dates, partners, funding and capacity need confirmation. The deck grants no external-action authority.</a:t>
             </a:r>
           </a:p>
           <a:p>
@@ -1458,13 +1458,13 @@
           </a:p>
           <a:p>
             <a:r>
-              <a:t>A purchase process you can understand.</a:t>
+              <a:t>Purchase information and delivery</a:t>
             </a:r>
           </a:p>
           <a:p/>
           <a:p>
             <a:r>
-              <a:t>Actual seller agreements control every sale.</a:t>
+              <a:t>Actual seller agreements govern every sale.</a:t>
             </a:r>
           </a:p>
           <a:p/>
@@ -1486,7 +1486,7 @@
           <a:p/>
           <a:p>
             <a:r>
-              <a:t>Status: working proposal; site/date/partners/funding/capacities unconfirmed. No external action is authorized by the deck.</a:t>
+              <a:t>Status: working proposal. Site, dates, partners, funding and capacity need confirmation. The deck grants no external-action authority.</a:t>
             </a:r>
           </a:p>
           <a:p>
@@ -1576,13 +1576,13 @@
           </a:p>
           <a:p>
             <a:r>
-              <a:t>Your collection. Your privacy.</a:t>
+              <a:t>Collector privacy</a:t>
             </a:r>
           </a:p>
           <a:p/>
           <a:p>
             <a:r>
-              <a:t>Preferences and appointment details are handled with consent and controlled access.</a:t>
+              <a:t>Ask permission for preferences and appointments. Limit staff access to the records they need.</a:t>
             </a:r>
           </a:p>
           <a:p/>
@@ -1604,7 +1604,7 @@
           <a:p/>
           <a:p>
             <a:r>
-              <a:t>Status: working proposal; site/date/partners/funding/capacities unconfirmed. No external action is authorized by the deck.</a:t>
+              <a:t>Status: working proposal. Site, dates, partners, funding and capacity need confirmation. The deck grants no external-action authority.</a:t>
             </a:r>
           </a:p>
           <a:p>
@@ -1694,13 +1694,13 @@
           </a:p>
           <a:p>
             <a:r>
-              <a:t>A proposed reason to travel.</a:t>
+              <a:t>Proposed travel week</a:t>
             </a:r>
           </a:p>
           <a:p/>
           <a:p>
             <a:r>
-              <a:t>Dates and site remain unbooked; travel should wait for confirmation.</a:t>
+              <a:t>Wait for venue and date confirmation before booking travel.</a:t>
             </a:r>
           </a:p>
           <a:p/>
@@ -1722,7 +1722,7 @@
           <a:p/>
           <a:p>
             <a:r>
-              <a:t>Status: working proposal; site/date/partners/funding/capacities unconfirmed. No external action is authorized by the deck.</a:t>
+              <a:t>Status: working proposal. Site, dates, partners, funding and capacity need confirmation. The deck grants no external-action authority.</a:t>
             </a:r>
           </a:p>
           <a:p>
@@ -1812,13 +1812,13 @@
           </a:p>
           <a:p>
             <a:r>
-              <a:t>Welcoming by design.</a:t>
+              <a:t>Free access and optional paid programs</a:t>
             </a:r>
           </a:p>
           <a:p/>
           <a:p>
             <a:r>
-              <a:t>Serious art and public generosity belong together.</a:t>
+              <a:t>Core art discovery needs no premium purchase. Guides and workshops may charge separately.</a:t>
             </a:r>
           </a:p>
           <a:p/>
@@ -1829,7 +1829,7 @@
           </a:p>
           <a:p>
             <a:r>
-              <a:t>Optional depth / Reserved guided experiences and workshops may be paid.</a:t>
+              <a:t>Optional depth / Optional guides and workshops may charge separate fees.</a:t>
             </a:r>
           </a:p>
           <a:p>
@@ -1840,7 +1840,7 @@
           <a:p/>
           <a:p>
             <a:r>
-              <a:t>Status: working proposal; site/date/partners/funding/capacities unconfirmed. No external action is authorized by the deck.</a:t>
+              <a:t>Status: working proposal. Site, dates, partners, funding and capacity need confirmation. The deck grants no external-action authority.</a:t>
             </a:r>
           </a:p>
           <a:p>
@@ -5043,7 +5043,7 @@
               </a:defRPr>
             </a:pPr>
             <a:r>
-              <a:t>Proposed Denver Art Fair &amp; Exhibition · August 2027</a:t>
+              <a:t>Proposed Denver Art Fair &amp; Exhibition, August 2027</a:t>
             </a:r>
           </a:p>
         </p:txBody>
@@ -5726,7 +5726,7 @@
               </a:defRPr>
             </a:pPr>
             <a:r>
-              <a:t>Help shape the right offer.</a:t>
+              <a:t>Collector research questions</a:t>
             </a:r>
           </a:p>
         </p:txBody>
@@ -5771,7 +5771,7 @@
               </a:defRPr>
             </a:pPr>
             <a:r>
-              <a:t>We are testing actual needs rather than guessing who will buy.</a:t>
+              <a:t>Ask about actual interests, practical needs and buying support.</a:t>
             </a:r>
           </a:p>
         </p:txBody>
@@ -6681,29 +6681,7 @@
               </a:defRPr>
             </a:pPr>
             <a:r>
-              <a:t>Tell us what would make it</a:t>
-            </a:r>
-          </a:p>
-          <a:p>
-            <a:pPr>
-              <a:lnSpc>
-                <a:spcPct val="108000"/>
-              </a:lnSpc>
-              <a:spcBef>
-                <a:spcPts val="0"/>
-              </a:spcBef>
-              <a:spcAft>
-                <a:spcPts val="0"/>
-              </a:spcAft>
-              <a:defRPr sz="5200" b="1">
-                <a:solidFill>
-                  <a:srgbClr val="F3F0E9"/>
-                </a:solidFill>
-                <a:latin typeface="Arial"/>
-              </a:defRPr>
-            </a:pPr>
-            <a:r>
-              <a:t>worthwhile.</a:t>
+              <a:t>Expression of interest</a:t>
             </a:r>
           </a:p>
         </p:txBody>
@@ -6716,7 +6694,7 @@
         </p:nvSpPr>
         <p:spPr>
           <a:xfrm>
-            <a:off x="914400" y="3250184"/>
+            <a:off x="914400" y="2470912"/>
             <a:ext cx="9601200" cy="1371600"/>
           </a:xfrm>
           <a:prstGeom prst="rect">
@@ -6748,29 +6726,7 @@
               </a:defRPr>
             </a:pPr>
             <a:r>
-              <a:t>An expression of interest is not a reservation, purchase obligation or</a:t>
-            </a:r>
-          </a:p>
-          <a:p>
-            <a:pPr>
-              <a:lnSpc>
-                <a:spcPct val="108000"/>
-              </a:lnSpc>
-              <a:spcBef>
-                <a:spcPts val="0"/>
-              </a:spcBef>
-              <a:spcAft>
-                <a:spcPts val="0"/>
-              </a:spcAft>
-              <a:defRPr sz="2300" b="0">
-                <a:solidFill>
-                  <a:srgbClr val="F3F0E9"/>
-                </a:solidFill>
-                <a:latin typeface="Arial"/>
-              </a:defRPr>
-            </a:pPr>
-            <a:r>
-              <a:t>promised work allocation.</a:t>
+              <a:t>Interest creates no reservation, purchase obligation or artwork allocation.</a:t>
             </a:r>
           </a:p>
         </p:txBody>
@@ -6783,7 +6739,7 @@
         </p:nvSpPr>
         <p:spPr>
           <a:xfrm>
-            <a:off x="914400" y="4259580"/>
+            <a:off x="914400" y="4160520"/>
             <a:ext cx="73152" cy="384048"/>
           </a:xfrm>
           <a:prstGeom prst="rect">
@@ -6826,7 +6782,7 @@
         </p:nvSpPr>
         <p:spPr>
           <a:xfrm>
-            <a:off x="1188720" y="4259580"/>
+            <a:off x="1188720" y="4160520"/>
             <a:ext cx="9235440" cy="640080"/>
           </a:xfrm>
           <a:prstGeom prst="rect">
@@ -6871,7 +6827,7 @@
         </p:nvSpPr>
         <p:spPr>
           <a:xfrm>
-            <a:off x="914400" y="4991100"/>
+            <a:off x="914400" y="4892040"/>
             <a:ext cx="73152" cy="384048"/>
           </a:xfrm>
           <a:prstGeom prst="rect">
@@ -6914,7 +6870,7 @@
         </p:nvSpPr>
         <p:spPr>
           <a:xfrm>
-            <a:off x="1188720" y="4991100"/>
+            <a:off x="1188720" y="4892040"/>
             <a:ext cx="9235440" cy="640080"/>
           </a:xfrm>
           <a:prstGeom prst="rect">
@@ -6959,7 +6915,7 @@
         </p:nvSpPr>
         <p:spPr>
           <a:xfrm>
-            <a:off x="914400" y="5722620"/>
+            <a:off x="914400" y="5623560"/>
             <a:ext cx="73152" cy="384048"/>
           </a:xfrm>
           <a:prstGeom prst="rect">
@@ -7002,7 +6958,7 @@
         </p:nvSpPr>
         <p:spPr>
           <a:xfrm>
-            <a:off x="1188720" y="5722620"/>
+            <a:off x="1188720" y="5623560"/>
             <a:ext cx="9235440" cy="640080"/>
           </a:xfrm>
           <a:prstGeom prst="rect">
@@ -7672,7 +7628,7 @@
               </a:defRPr>
             </a:pPr>
             <a:r>
-              <a:t>A carefully labeled proposition.</a:t>
+              <a:t>Sources and current status</a:t>
             </a:r>
           </a:p>
         </p:txBody>
@@ -7717,7 +7673,7 @@
               </a:defRPr>
             </a:pPr>
             <a:r>
-              <a:t>No artwork inventory, celebrity appearance, venue/date or gallery partnership is guaranteed.</a:t>
+              <a:t>The project guarantees no inventory, appearance, venue, date or gallery participation.</a:t>
             </a:r>
           </a:p>
         </p:txBody>
@@ -7897,7 +7853,7 @@
               </a:defRPr>
             </a:pPr>
             <a:r>
-              <a:t>All displayed graphics are original concepts, not reproductions of a named artist's work.</a:t>
+              <a:t>The deck uses original concept graphics. It reproduces no named artist’s work.</a:t>
             </a:r>
           </a:p>
         </p:txBody>
@@ -8281,51 +8237,7 @@
               </a:defRPr>
             </a:pPr>
             <a:r>
-              <a:t>Distinctive work.</a:t>
-            </a:r>
-          </a:p>
-          <a:p>
-            <a:pPr>
-              <a:lnSpc>
-                <a:spcPct val="108000"/>
-              </a:lnSpc>
-              <a:spcBef>
-                <a:spcPts val="0"/>
-              </a:spcBef>
-              <a:spcAft>
-                <a:spcPts val="0"/>
-              </a:spcAft>
-              <a:defRPr sz="5000" b="1">
-                <a:solidFill>
-                  <a:srgbClr val="151A22"/>
-                </a:solidFill>
-                <a:latin typeface="Arial"/>
-              </a:defRPr>
-            </a:pPr>
-            <a:r>
-              <a:t>Trusted sellers.</a:t>
-            </a:r>
-          </a:p>
-          <a:p>
-            <a:pPr>
-              <a:lnSpc>
-                <a:spcPct val="108000"/>
-              </a:lnSpc>
-              <a:spcBef>
-                <a:spcPts val="0"/>
-              </a:spcBef>
-              <a:spcAft>
-                <a:spcPts val="0"/>
-              </a:spcAft>
-              <a:defRPr sz="5000" b="1">
-                <a:solidFill>
-                  <a:srgbClr val="151A22"/>
-                </a:solidFill>
-                <a:latin typeface="Arial"/>
-              </a:defRPr>
-            </a:pPr>
-            <a:r>
-              <a:t>Time to look.</a:t>
+              <a:t>Art selection and buying service</a:t>
             </a:r>
           </a:p>
         </p:txBody>
@@ -8338,7 +8250,7 @@
         </p:nvSpPr>
         <p:spPr>
           <a:xfrm>
-            <a:off x="914400" y="3284220"/>
+            <a:off x="914400" y="1887220"/>
             <a:ext cx="12618720" cy="1005840"/>
           </a:xfrm>
           <a:prstGeom prst="rect">
@@ -8370,7 +8282,7 @@
               </a:defRPr>
             </a:pPr>
             <a:r>
-              <a:t>The proposition is thoughtful discovery with dependable acquisition service.</a:t>
+              <a:t>The proposal combines selected gallery and artist presentations with human acquisition support.</a:t>
             </a:r>
           </a:p>
         </p:txBody>
@@ -8383,7 +8295,7 @@
         </p:nvSpPr>
         <p:spPr>
           <a:xfrm>
-            <a:off x="914400" y="3916426"/>
+            <a:off x="914400" y="2880360"/>
             <a:ext cx="68580" cy="457200"/>
           </a:xfrm>
           <a:prstGeom prst="rect">
@@ -8426,8 +8338,8 @@
         </p:nvSpPr>
         <p:spPr>
           <a:xfrm>
-            <a:off x="1234440" y="3888993"/>
-            <a:ext cx="12252960" cy="1032340"/>
+            <a:off x="1234440" y="2852928"/>
+            <a:ext cx="12252960" cy="1377695"/>
           </a:xfrm>
           <a:prstGeom prst="rect">
             <a:avLst/>
@@ -8471,7 +8383,7 @@
         </p:nvSpPr>
         <p:spPr>
           <a:xfrm>
-            <a:off x="914400" y="5067638"/>
+            <a:off x="914400" y="4376928"/>
             <a:ext cx="68580" cy="457200"/>
           </a:xfrm>
           <a:prstGeom prst="rect">
@@ -8514,8 +8426,8 @@
         </p:nvSpPr>
         <p:spPr>
           <a:xfrm>
-            <a:off x="1234440" y="5040206"/>
-            <a:ext cx="12252960" cy="1032340"/>
+            <a:off x="1234440" y="4349496"/>
+            <a:ext cx="12252960" cy="1377695"/>
           </a:xfrm>
           <a:prstGeom prst="rect">
             <a:avLst/>
@@ -8546,7 +8458,7 @@
               </a:defRPr>
             </a:pPr>
             <a:r>
-              <a:t>A remarkable environment without losing clarity.</a:t>
+              <a:t>Rooms for work, with readable labels and clear routes.</a:t>
             </a:r>
           </a:p>
         </p:txBody>
@@ -8559,7 +8471,7 @@
         </p:nvSpPr>
         <p:spPr>
           <a:xfrm>
-            <a:off x="914400" y="6218851"/>
+            <a:off x="914400" y="5873496"/>
             <a:ext cx="68580" cy="457200"/>
           </a:xfrm>
           <a:prstGeom prst="rect">
@@ -8602,8 +8514,8 @@
         </p:nvSpPr>
         <p:spPr>
           <a:xfrm>
-            <a:off x="1234440" y="6191419"/>
-            <a:ext cx="12252960" cy="1032340"/>
+            <a:off x="1234440" y="5846063"/>
+            <a:ext cx="12252960" cy="1377695"/>
           </a:xfrm>
           <a:prstGeom prst="rect">
             <a:avLst/>
@@ -8634,7 +8546,7 @@
               </a:defRPr>
             </a:pPr>
             <a:r>
-              <a:t>A real human who can help you follow through.</a:t>
+              <a:t>A staff contact for appointments, seller questions and delivery follow-up.</a:t>
             </a:r>
           </a:p>
         </p:txBody>
@@ -8928,7 +8840,7 @@
               </a:defRPr>
             </a:pPr>
             <a:r>
-              <a:t>What would make the trip worthwhile?</a:t>
+              <a:t>Reasons to visit Denver</a:t>
             </a:r>
           </a:p>
         </p:txBody>
@@ -8973,7 +8885,7 @@
               </a:defRPr>
             </a:pPr>
             <a:r>
-              <a:t>This is a demand conversation; the roster and work are not confirmed.</a:t>
+              <a:t>Buyer interviews must establish demand. The project has no confirmed roster or available work.</a:t>
             </a:r>
           </a:p>
         </p:txBody>
@@ -9149,7 +9061,7 @@
               </a:defRPr>
             </a:pPr>
             <a:r>
-              <a:t>A coherent curatorial</a:t>
+              <a:t>Specific artists and works</a:t>
             </a:r>
           </a:p>
           <a:p>
@@ -9171,7 +9083,7 @@
               </a:defRPr>
             </a:pPr>
             <a:r>
-              <a:t>argument and work that</a:t>
+              <a:t>selected by an accountable</a:t>
             </a:r>
           </a:p>
           <a:p>
@@ -9193,7 +9105,7 @@
               </a:defRPr>
             </a:pPr>
             <a:r>
-              <a:t>rewards attention.</a:t>
+              <a:t>curator.</a:t>
             </a:r>
           </a:p>
         </p:txBody>
@@ -9905,7 +9817,7 @@
               </a:defRPr>
             </a:pPr>
             <a:r>
-              <a:t>A proposed constellation of rooms.</a:t>
+              <a:t>Proposed rooms and catalog</a:t>
             </a:r>
           </a:p>
         </p:txBody>
@@ -9950,7 +9862,7 @@
               </a:defRPr>
             </a:pPr>
             <a:r>
-              <a:t>60 functional spaces is a planning concept, not a confirmed building plan.</a:t>
+              <a:t>The 60-space concept needs a site survey and owner approval.</a:t>
             </a:r>
           </a:p>
         </p:txBody>
@@ -12935,7 +12847,7 @@
               </a:defRPr>
             </a:pPr>
             <a:r>
-              <a:t>CONCEPTUAL FUNCTION GRID / NOT A SURVEYED FLOOR PLAN</a:t>
+              <a:t>PROPOSED PROGRAM FUNCTIONS / SITE SURVEY PENDING</a:t>
             </a:r>
           </a:p>
         </p:txBody>
@@ -13229,7 +13141,7 @@
               </a:defRPr>
             </a:pPr>
             <a:r>
-              <a:t>The unexpected should have substance.</a:t>
+              <a:t>Signature commission ideas</a:t>
             </a:r>
           </a:p>
         </p:txBody>
@@ -13274,7 +13186,7 @@
               </a:defRPr>
             </a:pPr>
             <a:r>
-              <a:t>Signature concepts are uncommissioned invitations, not promised famous works.</a:t>
+              <a:t>Artists would develop these briefs through funded agreements. No famous work has a booking.</a:t>
             </a:r>
           </a:p>
         </p:txBody>
@@ -13450,7 +13362,7 @@
               </a:defRPr>
             </a:pPr>
             <a:r>
-              <a:t>A room that changes how you</a:t>
+              <a:t>An artist-authored room</a:t>
             </a:r>
           </a:p>
           <a:p>
@@ -13472,7 +13384,7 @@
               </a:defRPr>
             </a:pPr>
             <a:r>
-              <a:t>look.</a:t>
+              <a:t>exploring perception.</a:t>
             </a:r>
           </a:p>
         </p:txBody>
@@ -13648,7 +13560,7 @@
               </a:defRPr>
             </a:pPr>
             <a:r>
-              <a:t>Artist-led responses to work,</a:t>
+              <a:t>Work responding to office</a:t>
             </a:r>
           </a:p>
           <a:p>
@@ -13670,7 +13582,29 @@
               </a:defRPr>
             </a:pPr>
             <a:r>
-              <a:t>place and possibility.</a:t>
+              <a:t>materials and the history of</a:t>
+            </a:r>
+          </a:p>
+          <a:p>
+            <a:pPr>
+              <a:lnSpc>
+                <a:spcPct val="108000"/>
+              </a:lnSpc>
+              <a:spcBef>
+                <a:spcPts val="0"/>
+              </a:spcBef>
+              <a:spcAft>
+                <a:spcPts val="0"/>
+              </a:spcAft>
+              <a:defRPr sz="2100" b="0">
+                <a:solidFill>
+                  <a:srgbClr val="151A22"/>
+                </a:solidFill>
+                <a:latin typeface="Arial"/>
+              </a:defRPr>
+            </a:pPr>
+            <a:r>
+              <a:t>the site.</a:t>
             </a:r>
           </a:p>
         </p:txBody>
@@ -13846,7 +13780,7 @@
               </a:defRPr>
             </a:pPr>
             <a:r>
-              <a:t>Paid local contribution and a</a:t>
+              <a:t>Paid local artists and free</a:t>
             </a:r>
           </a:p>
           <a:p>
@@ -13868,7 +13802,7 @@
               </a:defRPr>
             </a:pPr>
             <a:r>
-              <a:t>genuine welcome.</a:t>
+              <a:t>public access.</a:t>
             </a:r>
           </a:p>
         </p:txBody>
@@ -14162,7 +14096,7 @@
               </a:defRPr>
             </a:pPr>
             <a:r>
-              <a:t>A purchase process you can understand.</a:t>
+              <a:t>Purchase information and delivery</a:t>
             </a:r>
           </a:p>
         </p:txBody>
@@ -14207,7 +14141,7 @@
               </a:defRPr>
             </a:pPr>
             <a:r>
-              <a:t>Actual seller agreements control every sale.</a:t>
+              <a:t>Actual seller agreements govern every sale.</a:t>
             </a:r>
           </a:p>
         </p:txBody>
@@ -15161,29 +15095,7 @@
               </a:defRPr>
             </a:pPr>
             <a:r>
-              <a:t>Your collection.</a:t>
-            </a:r>
-          </a:p>
-          <a:p>
-            <a:pPr>
-              <a:lnSpc>
-                <a:spcPct val="108000"/>
-              </a:lnSpc>
-              <a:spcBef>
-                <a:spcPts val="0"/>
-              </a:spcBef>
-              <a:spcAft>
-                <a:spcPts val="0"/>
-              </a:spcAft>
-              <a:defRPr sz="5000" b="1">
-                <a:solidFill>
-                  <a:srgbClr val="151A22"/>
-                </a:solidFill>
-                <a:latin typeface="Arial"/>
-              </a:defRPr>
-            </a:pPr>
-            <a:r>
-              <a:t>Your privacy.</a:t>
+              <a:t>Collector privacy</a:t>
             </a:r>
           </a:p>
         </p:txBody>
@@ -15196,7 +15108,7 @@
         </p:nvSpPr>
         <p:spPr>
           <a:xfrm>
-            <a:off x="914400" y="2585720"/>
+            <a:off x="914400" y="1887220"/>
             <a:ext cx="12618720" cy="1005840"/>
           </a:xfrm>
           <a:prstGeom prst="rect">
@@ -15228,7 +15140,7 @@
               </a:defRPr>
             </a:pPr>
             <a:r>
-              <a:t>Preferences and appointment details are handled with consent and controlled access.</a:t>
+              <a:t>Ask permission for preferences and appointments. Limit staff access to the records they need.</a:t>
             </a:r>
           </a:p>
         </p:txBody>
@@ -15241,7 +15153,7 @@
         </p:nvSpPr>
         <p:spPr>
           <a:xfrm>
-            <a:off x="914400" y="3217926"/>
+            <a:off x="914400" y="2880360"/>
             <a:ext cx="68580" cy="457200"/>
           </a:xfrm>
           <a:prstGeom prst="rect">
@@ -15284,8 +15196,8 @@
         </p:nvSpPr>
         <p:spPr>
           <a:xfrm>
-            <a:off x="1234440" y="3190494"/>
-            <a:ext cx="12252960" cy="1265173"/>
+            <a:off x="1234440" y="2852928"/>
+            <a:ext cx="12252960" cy="1377695"/>
           </a:xfrm>
           <a:prstGeom prst="rect">
             <a:avLst/>
@@ -15329,7 +15241,7 @@
         </p:nvSpPr>
         <p:spPr>
           <a:xfrm>
-            <a:off x="914400" y="4601972"/>
+            <a:off x="914400" y="4376928"/>
             <a:ext cx="68580" cy="457200"/>
           </a:xfrm>
           <a:prstGeom prst="rect">
@@ -15372,8 +15284,8 @@
         </p:nvSpPr>
         <p:spPr>
           <a:xfrm>
-            <a:off x="1234440" y="4574540"/>
-            <a:ext cx="12252960" cy="1265173"/>
+            <a:off x="1234440" y="4349496"/>
+            <a:ext cx="12252960" cy="1377695"/>
           </a:xfrm>
           <a:prstGeom prst="rect">
             <a:avLst/>
@@ -15417,7 +15329,7 @@
         </p:nvSpPr>
         <p:spPr>
           <a:xfrm>
-            <a:off x="914400" y="5986018"/>
+            <a:off x="914400" y="5873496"/>
             <a:ext cx="68580" cy="457200"/>
           </a:xfrm>
           <a:prstGeom prst="rect">
@@ -15460,8 +15372,8 @@
         </p:nvSpPr>
         <p:spPr>
           <a:xfrm>
-            <a:off x="1234440" y="5958586"/>
-            <a:ext cx="12252960" cy="1265173"/>
+            <a:off x="1234440" y="5846063"/>
+            <a:ext cx="12252960" cy="1377695"/>
           </a:xfrm>
           <a:prstGeom prst="rect">
             <a:avLst/>
@@ -15786,7 +15698,7 @@
               </a:defRPr>
             </a:pPr>
             <a:r>
-              <a:t>A proposed reason to travel.</a:t>
+              <a:t>Proposed travel week</a:t>
             </a:r>
           </a:p>
         </p:txBody>
@@ -15831,7 +15743,7 @@
               </a:defRPr>
             </a:pPr>
             <a:r>
-              <a:t>Dates and site remain unbooked; travel should wait for confirmation.</a:t>
+              <a:t>Wait for venue and date confirmation before booking travel.</a:t>
             </a:r>
           </a:p>
         </p:txBody>
@@ -16719,7 +16631,7 @@
               </a:defRPr>
             </a:pPr>
             <a:r>
-              <a:t>Welcoming by design.</a:t>
+              <a:t>Free access and optional paid programs</a:t>
             </a:r>
           </a:p>
         </p:txBody>
@@ -16764,7 +16676,7 @@
               </a:defRPr>
             </a:pPr>
             <a:r>
-              <a:t>Serious art and public generosity belong together.</a:t>
+              <a:t>Core art discovery needs no premium purchase. Guides and workshops may charge separately.</a:t>
             </a:r>
           </a:p>
         </p:txBody>
@@ -17138,7 +17050,7 @@
               </a:defRPr>
             </a:pPr>
             <a:r>
-              <a:t>Reserved guided experiences</a:t>
+              <a:t>Optional guides and</a:t>
             </a:r>
           </a:p>
           <a:p>
@@ -17160,7 +17072,29 @@
               </a:defRPr>
             </a:pPr>
             <a:r>
-              <a:t>and workshops may be paid.</a:t>
+              <a:t>workshops may charge</a:t>
+            </a:r>
+          </a:p>
+          <a:p>
+            <a:pPr>
+              <a:lnSpc>
+                <a:spcPct val="108000"/>
+              </a:lnSpc>
+              <a:spcBef>
+                <a:spcPts val="0"/>
+              </a:spcBef>
+              <a:spcAft>
+                <a:spcPts val="0"/>
+              </a:spcAft>
+              <a:defRPr sz="2100" b="0">
+                <a:solidFill>
+                  <a:srgbClr val="151A22"/>
+                </a:solidFill>
+                <a:latin typeface="Arial"/>
+              </a:defRPr>
+            </a:pPr>
+            <a:r>
+              <a:t>separate fees.</a:t>
             </a:r>
           </a:p>
         </p:txBody>
